--- a/backlogs/Pithub Recruitment Presentation.pptx
+++ b/backlogs/Pithub Recruitment Presentation.pptx
@@ -6,11 +6,13 @@
   </p:sldMasterIdLst>
   <p:sldIdLst>
     <p:sldId id="256" r:id="rId2"/>
-    <p:sldId id="257" r:id="rId3"/>
-    <p:sldId id="258" r:id="rId4"/>
-    <p:sldId id="259" r:id="rId5"/>
-    <p:sldId id="260" r:id="rId6"/>
-    <p:sldId id="261" r:id="rId7"/>
+    <p:sldId id="264" r:id="rId3"/>
+    <p:sldId id="265" r:id="rId4"/>
+    <p:sldId id="257" r:id="rId5"/>
+    <p:sldId id="258" r:id="rId6"/>
+    <p:sldId id="259" r:id="rId7"/>
+    <p:sldId id="260" r:id="rId8"/>
+    <p:sldId id="261" r:id="rId9"/>
   </p:sldIdLst>
   <p:sldSz cx="12192000" cy="6858000"/>
   <p:notesSz cx="6858000" cy="9144000"/>
@@ -120,7 +122,7 @@
 <file path=ppt/revisionInfo.xml><?xml version="1.0" encoding="utf-8"?>
 <p1510:revInfo xmlns:a="http://schemas.openxmlformats.org/drawingml/2006/main" xmlns:r="http://schemas.openxmlformats.org/officeDocument/2006/relationships" xmlns:p1510="http://schemas.microsoft.com/office/powerpoint/2015/10/main">
   <p1510:revLst>
-    <p1510:client id="{0BC4A89E-33E0-8BCD-3F3B-44C4405E0CD1}" v="803" dt="2026-09-15T18:21:45.372"/>
+    <p1510:client id="{00000000-0000-0000-0000-000000000000}" v="1699" dt="2026-09-22T19:34:36.147"/>
   </p1510:revLst>
 </p1510:revInfo>
 </file>
@@ -352,7 +354,7 @@
           <a:p>
             <a:fld id="{BBB8170F-0370-4A38-8BF3-83D69476AE62}" type="datetimeFigureOut">
               <a:rPr lang="en-US" dirty="0"/>
-              <a:t>9/15/2026</a:t>
+              <a:t>9/22/2026</a:t>
             </a:fld>
             <a:endParaRPr lang="en-US" dirty="0"/>
           </a:p>
@@ -699,7 +701,7 @@
           <a:p>
             <a:fld id="{491FA625-EDE8-4CCD-93F2-36B8EAED6AA1}" type="datetimeFigureOut">
               <a:rPr lang="en-US" dirty="0"/>
-              <a:t>9/15/2026</a:t>
+              <a:t>9/22/2026</a:t>
             </a:fld>
             <a:endParaRPr lang="en-US" dirty="0"/>
           </a:p>
@@ -1012,7 +1014,7 @@
           <a:p>
             <a:fld id="{5824A7B9-17B9-4425-9158-739F678A55EB}" type="datetimeFigureOut">
               <a:rPr lang="en-US" dirty="0"/>
-              <a:t>9/15/2026</a:t>
+              <a:t>9/22/2026</a:t>
             </a:fld>
             <a:endParaRPr lang="en-US" dirty="0"/>
           </a:p>
@@ -1277,7 +1279,7 @@
           <a:p>
             <a:fld id="{28E8FF4C-7F6A-4962-9270-F797B8959287}" type="datetimeFigureOut">
               <a:rPr lang="en-US" dirty="0"/>
-              <a:t>9/15/2026</a:t>
+              <a:t>9/22/2026</a:t>
             </a:fld>
             <a:endParaRPr lang="en-US" dirty="0"/>
           </a:p>
@@ -1595,7 +1597,7 @@
           <a:p>
             <a:fld id="{064F86E1-145A-4683-AD05-97E7E41B4995}" type="datetimeFigureOut">
               <a:rPr lang="en-US" dirty="0"/>
-              <a:t>9/15/2026</a:t>
+              <a:t>9/22/2026</a:t>
             </a:fld>
             <a:endParaRPr lang="en-US" dirty="0"/>
           </a:p>
@@ -1915,7 +1917,7 @@
           <a:p>
             <a:fld id="{96B14CE5-CB23-4F24-AF40-FFA10F25B799}" type="datetimeFigureOut">
               <a:rPr lang="en-US" dirty="0"/>
-              <a:t>9/15/2026</a:t>
+              <a:t>9/22/2026</a:t>
             </a:fld>
             <a:endParaRPr lang="en-US" dirty="0"/>
           </a:p>
@@ -2223,7 +2225,7 @@
           <a:p>
             <a:fld id="{C939A3FF-4925-4C53-B6D9-F2B1807D4179}" type="datetimeFigureOut">
               <a:rPr lang="en-US" dirty="0"/>
-              <a:t>9/15/2026</a:t>
+              <a:t>9/22/2026</a:t>
             </a:fld>
             <a:endParaRPr lang="en-US" dirty="0"/>
           </a:p>
@@ -2725,7 +2727,7 @@
           <a:p>
             <a:fld id="{220747AD-BB60-464B-B16B-6CC7DCEAA31E}" type="datetimeFigureOut">
               <a:rPr lang="en-US" dirty="0"/>
-              <a:t>9/15/2026</a:t>
+              <a:t>9/22/2026</a:t>
             </a:fld>
             <a:endParaRPr lang="en-US" dirty="0"/>
           </a:p>
@@ -2973,7 +2975,7 @@
           <a:p>
             <a:fld id="{B340F08F-40FA-4D3B-96CF-F8FAF483E9A7}" type="datetimeFigureOut">
               <a:rPr lang="en-US" dirty="0"/>
-              <a:t>9/15/2026</a:t>
+              <a:t>9/22/2026</a:t>
             </a:fld>
             <a:endParaRPr lang="en-US" dirty="0"/>
           </a:p>
@@ -3331,7 +3333,7 @@
           <a:p>
             <a:fld id="{EB5EDF0F-3515-4895-B663-882304741893}" type="datetimeFigureOut">
               <a:rPr lang="en-US" dirty="0"/>
-              <a:t>9/15/2026</a:t>
+              <a:t>9/22/2026</a:t>
             </a:fld>
             <a:endParaRPr lang="en-US" dirty="0"/>
           </a:p>
@@ -3822,7 +3824,7 @@
           <a:p>
             <a:fld id="{05B29ED0-7871-4976-8402-1756C1FAC1EA}" type="datetimeFigureOut">
               <a:rPr lang="en-US" dirty="0"/>
-              <a:t>9/15/2026</a:t>
+              <a:t>9/22/2026</a:t>
             </a:fld>
             <a:endParaRPr lang="en-US" dirty="0"/>
           </a:p>
@@ -4100,7 +4102,7 @@
           <a:p>
             <a:fld id="{20D15516-589F-487D-BF51-9635DCEA90D5}" type="datetimeFigureOut">
               <a:rPr lang="en-US" dirty="0"/>
-              <a:t>9/15/2026</a:t>
+              <a:t>9/22/2026</a:t>
             </a:fld>
             <a:endParaRPr lang="en-US" dirty="0"/>
           </a:p>
@@ -4438,7 +4440,7 @@
           <a:p>
             <a:fld id="{453B8C54-B76A-4DD8-BD0B-11200408342B}" type="datetimeFigureOut">
               <a:rPr lang="en-US" dirty="0"/>
-              <a:t>9/15/2026</a:t>
+              <a:t>9/22/2026</a:t>
             </a:fld>
             <a:endParaRPr lang="en-US" dirty="0"/>
           </a:p>
@@ -4787,7 +4789,7 @@
           <a:p>
             <a:fld id="{15448BDD-274C-4BED-8350-833672089118}" type="datetimeFigureOut">
               <a:rPr lang="en-US" dirty="0"/>
-              <a:t>9/15/2026</a:t>
+              <a:t>9/22/2026</a:t>
             </a:fld>
             <a:endParaRPr lang="en-US" dirty="0"/>
           </a:p>
@@ -5043,7 +5045,7 @@
           <a:p>
             <a:fld id="{9EAD527F-9C49-4481-A18C-80BA2EA99E79}" type="datetimeFigureOut">
               <a:rPr lang="en-US" dirty="0"/>
-              <a:t>9/15/2026</a:t>
+              <a:t>9/22/2026</a:t>
             </a:fld>
             <a:endParaRPr lang="en-US" dirty="0"/>
           </a:p>
@@ -5367,7 +5369,7 @@
           <a:p>
             <a:fld id="{F38039EB-95FD-42A0-BF06-87A9D15142C9}" type="datetimeFigureOut">
               <a:rPr lang="en-US" dirty="0"/>
-              <a:t>9/15/2026</a:t>
+              <a:t>9/22/2026</a:t>
             </a:fld>
             <a:endParaRPr lang="en-US" dirty="0"/>
           </a:p>
@@ -5832,7 +5834,7 @@
           <a:p>
             <a:fld id="{6819701D-AA71-4F6F-B74A-236E07E9ABE4}" type="datetimeFigureOut">
               <a:rPr lang="en-US" dirty="0"/>
-              <a:t>9/15/2026</a:t>
+              <a:t>9/22/2026</a:t>
             </a:fld>
             <a:endParaRPr lang="en-US" dirty="0"/>
           </a:p>
@@ -5949,7 +5951,7 @@
           <a:p>
             <a:fld id="{A886D589-8B08-4190-9F3B-BA01ED2999CB}" type="datetimeFigureOut">
               <a:rPr lang="en-US" dirty="0"/>
-              <a:t>9/15/2026</a:t>
+              <a:t>9/22/2026</a:t>
             </a:fld>
             <a:endParaRPr lang="en-US" dirty="0"/>
           </a:p>
@@ -6185,7 +6187,7 @@
           <a:p>
             <a:fld id="{12A08923-D58E-4822-B554-6A1173FCE25D}" type="datetimeFigureOut">
               <a:rPr lang="en-US" dirty="0"/>
-              <a:t>9/15/2026</a:t>
+              <a:t>9/22/2026</a:t>
             </a:fld>
             <a:endParaRPr lang="en-US" dirty="0"/>
           </a:p>
@@ -6556,7 +6558,7 @@
           <a:p>
             <a:fld id="{F50BF9E0-60DA-4D6D-8F14-825F152220D6}" type="datetimeFigureOut">
               <a:rPr lang="en-US" dirty="0"/>
-              <a:t>9/15/2026</a:t>
+              <a:t>9/22/2026</a:t>
             </a:fld>
             <a:endParaRPr lang="en-US" dirty="0"/>
           </a:p>
@@ -6778,7 +6780,7 @@
           <a:p>
             <a:fld id="{846CE7D5-CF57-46EF-B807-FDD0502418D4}" type="datetimeFigureOut">
               <a:rPr lang="en-US" smtClean="0"/>
-              <a:t>9/15/2026</a:t>
+              <a:t>9/22/2026</a:t>
             </a:fld>
             <a:endParaRPr lang="en-US"/>
           </a:p>
@@ -6948,7 +6950,7 @@
           <a:p>
             <a:fld id="{846CE7D5-CF57-46EF-B807-FDD0502418D4}" type="datetimeFigureOut">
               <a:rPr lang="en-US" smtClean="0"/>
-              <a:t>9/15/2026</a:t>
+              <a:t>9/22/2026</a:t>
             </a:fld>
             <a:endParaRPr lang="en-US"/>
           </a:p>
@@ -7237,7 +7239,7 @@
           <a:p>
             <a:fld id="{BD5D1244-0536-4076-95F8-65E3144966FF}" type="datetimeFigureOut">
               <a:rPr lang="en-US" dirty="0"/>
-              <a:t>9/15/2026</a:t>
+              <a:t>9/22/2026</a:t>
             </a:fld>
             <a:endParaRPr lang="en-US" dirty="0"/>
           </a:p>
@@ -7535,7 +7537,7 @@
           <a:p>
             <a:fld id="{E8F94E15-B448-489B-871D-A40527BFA7B7}" type="datetimeFigureOut">
               <a:rPr lang="en-US" dirty="0"/>
-              <a:t>9/15/2026</a:t>
+              <a:t>9/22/2026</a:t>
             </a:fld>
             <a:endParaRPr lang="en-US" dirty="0"/>
           </a:p>
@@ -7821,7 +7823,7 @@
           <a:p>
             <a:fld id="{CE994A23-0EFF-404D-A2C5-6B54939039AD}" type="datetimeFigureOut">
               <a:rPr lang="en-US" dirty="0"/>
-              <a:t>9/15/2026</a:t>
+              <a:t>9/22/2026</a:t>
             </a:fld>
             <a:endParaRPr lang="en-US" dirty="0"/>
           </a:p>
@@ -8133,7 +8135,7 @@
           <a:p>
             <a:fld id="{D9D311C3-93DB-42DC-917F-4386F19A1E3B}" type="datetimeFigureOut">
               <a:rPr lang="en-US" dirty="0"/>
-              <a:t>9/15/2026</a:t>
+              <a:t>9/22/2026</a:t>
             </a:fld>
             <a:endParaRPr lang="en-US" dirty="0"/>
           </a:p>
@@ -8533,7 +8535,7 @@
           <a:p>
             <a:fld id="{948C47DC-C479-4517-B1B0-94DB01BA76E7}" type="datetimeFigureOut">
               <a:rPr lang="en-US" dirty="0"/>
-              <a:t>9/15/2026</a:t>
+              <a:t>9/22/2026</a:t>
             </a:fld>
             <a:endParaRPr lang="en-US" dirty="0"/>
           </a:p>
@@ -8843,7 +8845,7 @@
           <a:p>
             <a:fld id="{F92C9D0B-C1A3-434D-9CF9-A666A14DD8A1}" type="datetimeFigureOut">
               <a:rPr lang="en-US" dirty="0"/>
-              <a:t>9/15/2026</a:t>
+              <a:t>9/22/2026</a:t>
             </a:fld>
             <a:endParaRPr lang="en-US" dirty="0"/>
           </a:p>
@@ -9196,7 +9198,7 @@
           <a:p>
             <a:fld id="{742A22FE-7CAA-4561-B3B2-F8D8C37BE3D2}" type="datetimeFigureOut">
               <a:rPr lang="en-US" dirty="0"/>
-              <a:t>9/15/2026</a:t>
+              <a:t>9/22/2026</a:t>
             </a:fld>
             <a:endParaRPr lang="en-US" dirty="0"/>
           </a:p>
@@ -9545,7 +9547,7 @@
           <a:p>
             <a:fld id="{18A4B20A-718A-4149-B5D2-676E857EB828}" type="datetimeFigureOut">
               <a:rPr lang="en-US" dirty="0"/>
-              <a:t>9/15/2026</a:t>
+              <a:t>9/22/2026</a:t>
             </a:fld>
             <a:endParaRPr lang="en-US" dirty="0"/>
           </a:p>
@@ -10101,6 +10103,367 @@
   <p:cSld>
     <p:spTree>
       <p:nvGrpSpPr>
+        <p:cNvPr id="1" name="">
+          <a:extLst>
+            <a:ext uri="{FF2B5EF4-FFF2-40B4-BE49-F238E27FC236}">
+              <a16:creationId xmlns:a16="http://schemas.microsoft.com/office/drawing/2014/main" id="{38972087-75A6-BEDC-CC13-1057F99F04B4}"/>
+            </a:ext>
+          </a:extLst>
+        </p:cNvPr>
+        <p:cNvGrpSpPr/>
+        <p:nvPr/>
+      </p:nvGrpSpPr>
+      <p:grpSpPr>
+        <a:xfrm>
+          <a:off x="0" y="0"/>
+          <a:ext cx="0" cy="0"/>
+          <a:chOff x="0" y="0"/>
+          <a:chExt cx="0" cy="0"/>
+        </a:xfrm>
+      </p:grpSpPr>
+      <p:sp>
+        <p:nvSpPr>
+          <p:cNvPr id="2" name="Title 1">
+            <a:extLst>
+              <a:ext uri="{FF2B5EF4-FFF2-40B4-BE49-F238E27FC236}">
+                <a16:creationId xmlns:a16="http://schemas.microsoft.com/office/drawing/2014/main" id="{C5BCB206-3358-DB38-3D4D-3759ED439C24}"/>
+              </a:ext>
+            </a:extLst>
+          </p:cNvPr>
+          <p:cNvSpPr>
+            <a:spLocks noGrp="1"/>
+          </p:cNvSpPr>
+          <p:nvPr>
+            <p:ph type="title"/>
+          </p:nvPr>
+        </p:nvSpPr>
+        <p:spPr/>
+        <p:txBody>
+          <a:bodyPr/>
+          <a:lstStyle/>
+          <a:p>
+            <a:r>
+              <a:rPr lang="en-US" dirty="0"/>
+              <a:t>About </a:t>
+            </a:r>
+            <a:r>
+              <a:rPr lang="en-US" dirty="0" err="1"/>
+              <a:t>PitHub</a:t>
+            </a:r>
+          </a:p>
+        </p:txBody>
+      </p:sp>
+      <p:pic>
+        <p:nvPicPr>
+          <p:cNvPr id="4" name="Content Placeholder 3">
+            <a:extLst>
+              <a:ext uri="{FF2B5EF4-FFF2-40B4-BE49-F238E27FC236}">
+                <a16:creationId xmlns:a16="http://schemas.microsoft.com/office/drawing/2014/main" id="{6326B1C5-EB04-C1E8-631A-FAE1DF5EA9AE}"/>
+              </a:ext>
+            </a:extLst>
+          </p:cNvPr>
+          <p:cNvPicPr>
+            <a:picLocks noGrp="1" noChangeAspect="1"/>
+          </p:cNvPicPr>
+          <p:nvPr>
+            <p:ph idx="1"/>
+          </p:nvPr>
+        </p:nvPicPr>
+        <p:blipFill>
+          <a:blip r:embed="rId2"/>
+          <a:stretch>
+            <a:fillRect/>
+          </a:stretch>
+        </p:blipFill>
+        <p:spPr>
+          <a:xfrm>
+            <a:off x="-2070" y="-277"/>
+            <a:ext cx="2569309" cy="849202"/>
+          </a:xfrm>
+          <a:prstGeom prst="rect">
+            <a:avLst/>
+          </a:prstGeom>
+        </p:spPr>
+      </p:pic>
+      <p:sp>
+        <p:nvSpPr>
+          <p:cNvPr id="7" name="TextBox 6">
+            <a:extLst>
+              <a:ext uri="{FF2B5EF4-FFF2-40B4-BE49-F238E27FC236}">
+                <a16:creationId xmlns:a16="http://schemas.microsoft.com/office/drawing/2014/main" id="{6574DB16-790F-4FDC-8DD6-D9947F9B2728}"/>
+              </a:ext>
+            </a:extLst>
+          </p:cNvPr>
+          <p:cNvSpPr txBox="1"/>
+          <p:nvPr/>
+        </p:nvSpPr>
+        <p:spPr>
+          <a:xfrm>
+            <a:off x="360680" y="1731554"/>
+            <a:ext cx="11181080" cy="2862322"/>
+          </a:xfrm>
+          <a:prstGeom prst="rect">
+            <a:avLst/>
+          </a:prstGeom>
+          <a:noFill/>
+        </p:spPr>
+        <p:txBody>
+          <a:bodyPr rot="0" spcFirstLastPara="0" vertOverflow="overflow" horzOverflow="overflow" vert="horz" wrap="square" lIns="91440" tIns="45720" rIns="91440" bIns="45720" numCol="1" spcCol="0" rtlCol="0" fromWordArt="0" anchor="t" anchorCtr="0" forceAA="0" compatLnSpc="1">
+            <a:prstTxWarp prst="textNoShape">
+              <a:avLst/>
+            </a:prstTxWarp>
+            <a:spAutoFit/>
+          </a:bodyPr>
+          <a:lstStyle/>
+          <a:p>
+            <a:pPr marL="285750" indent="-285750">
+              <a:buFont typeface="Arial"/>
+              <a:buChar char="•"/>
+            </a:pPr>
+            <a:r>
+              <a:rPr lang="en-US" dirty="0" err="1"/>
+              <a:t>PitHub</a:t>
+            </a:r>
+            <a:r>
+              <a:rPr lang="en-US" dirty="0"/>
+              <a:t> is a Centralized Academic Resource Hub for Lewis University, designed to make instructional content easier to organize, access, and share. Our platform provides a centralized environment where university faculty, staff, as well as students can manage educational videos and documents in one place. </a:t>
+            </a:r>
+          </a:p>
+          <a:p>
+            <a:pPr marL="285750" indent="-285750">
+              <a:buFont typeface="Arial"/>
+              <a:buChar char="•"/>
+            </a:pPr>
+            <a:endParaRPr lang="en-US" dirty="0"/>
+          </a:p>
+          <a:p>
+            <a:pPr marL="285750" indent="-285750">
+              <a:buFont typeface="Arial"/>
+              <a:buChar char="•"/>
+            </a:pPr>
+            <a:r>
+              <a:rPr lang="en-US" dirty="0"/>
+              <a:t>Faculty and staff can organize  instructional videos and documents into class-based collections. Each class can include relevant information such as the course name, professor, description, and associated learning materials. This structure helps users locate resources according to their academic context rather than searching through unrelated files. </a:t>
+            </a:r>
+          </a:p>
+          <a:p>
+            <a:pPr marL="285750" indent="-285750">
+              <a:buFont typeface="Arial"/>
+              <a:buChar char="•"/>
+            </a:pPr>
+            <a:endParaRPr lang="en-US" dirty="0"/>
+          </a:p>
+          <a:p>
+            <a:pPr marL="285750" indent="-285750">
+              <a:buFont typeface="Arial"/>
+              <a:buChar char="•"/>
+            </a:pPr>
+            <a:endParaRPr lang="en-US" dirty="0"/>
+          </a:p>
+        </p:txBody>
+      </p:sp>
+    </p:spTree>
+    <p:extLst>
+      <p:ext uri="{BB962C8B-B14F-4D97-AF65-F5344CB8AC3E}">
+        <p14:creationId xmlns:p14="http://schemas.microsoft.com/office/powerpoint/2010/main" val="287484877"/>
+      </p:ext>
+    </p:extLst>
+  </p:cSld>
+  <p:clrMapOvr>
+    <a:masterClrMapping/>
+  </p:clrMapOvr>
+</p:sld>
+</file>
+
+<file path=ppt/slides/slide3.xml><?xml version="1.0" encoding="utf-8"?>
+<p:sld xmlns:a="http://schemas.openxmlformats.org/drawingml/2006/main" xmlns:r="http://schemas.openxmlformats.org/officeDocument/2006/relationships" xmlns:p="http://schemas.openxmlformats.org/presentationml/2006/main">
+  <p:cSld>
+    <p:spTree>
+      <p:nvGrpSpPr>
+        <p:cNvPr id="1" name="">
+          <a:extLst>
+            <a:ext uri="{FF2B5EF4-FFF2-40B4-BE49-F238E27FC236}">
+              <a16:creationId xmlns:a16="http://schemas.microsoft.com/office/drawing/2014/main" id="{6DC7851B-C655-1137-1E92-DE96FA438084}"/>
+            </a:ext>
+          </a:extLst>
+        </p:cNvPr>
+        <p:cNvGrpSpPr/>
+        <p:nvPr/>
+      </p:nvGrpSpPr>
+      <p:grpSpPr>
+        <a:xfrm>
+          <a:off x="0" y="0"/>
+          <a:ext cx="0" cy="0"/>
+          <a:chOff x="0" y="0"/>
+          <a:chExt cx="0" cy="0"/>
+        </a:xfrm>
+      </p:grpSpPr>
+      <p:sp>
+        <p:nvSpPr>
+          <p:cNvPr id="2" name="Title 1">
+            <a:extLst>
+              <a:ext uri="{FF2B5EF4-FFF2-40B4-BE49-F238E27FC236}">
+                <a16:creationId xmlns:a16="http://schemas.microsoft.com/office/drawing/2014/main" id="{B6B03F6B-C650-9A16-8E2F-48E33419DC77}"/>
+              </a:ext>
+            </a:extLst>
+          </p:cNvPr>
+          <p:cNvSpPr>
+            <a:spLocks noGrp="1"/>
+          </p:cNvSpPr>
+          <p:nvPr>
+            <p:ph type="title"/>
+          </p:nvPr>
+        </p:nvSpPr>
+        <p:spPr/>
+        <p:txBody>
+          <a:bodyPr/>
+          <a:lstStyle/>
+          <a:p>
+            <a:r>
+              <a:rPr lang="en-US" dirty="0"/>
+              <a:t>Technology Behind </a:t>
+            </a:r>
+            <a:r>
+              <a:rPr lang="en-US" dirty="0" err="1"/>
+              <a:t>PitHub</a:t>
+            </a:r>
+          </a:p>
+        </p:txBody>
+      </p:sp>
+      <p:pic>
+        <p:nvPicPr>
+          <p:cNvPr id="4" name="Content Placeholder 3">
+            <a:extLst>
+              <a:ext uri="{FF2B5EF4-FFF2-40B4-BE49-F238E27FC236}">
+                <a16:creationId xmlns:a16="http://schemas.microsoft.com/office/drawing/2014/main" id="{C7EE540F-DAE7-0199-E1E3-204A865D75FD}"/>
+              </a:ext>
+            </a:extLst>
+          </p:cNvPr>
+          <p:cNvPicPr>
+            <a:picLocks noGrp="1" noChangeAspect="1"/>
+          </p:cNvPicPr>
+          <p:nvPr>
+            <p:ph idx="1"/>
+          </p:nvPr>
+        </p:nvPicPr>
+        <p:blipFill>
+          <a:blip r:embed="rId2"/>
+          <a:stretch>
+            <a:fillRect/>
+          </a:stretch>
+        </p:blipFill>
+        <p:spPr>
+          <a:xfrm>
+            <a:off x="-2070" y="-277"/>
+            <a:ext cx="2569309" cy="849202"/>
+          </a:xfrm>
+          <a:prstGeom prst="rect">
+            <a:avLst/>
+          </a:prstGeom>
+        </p:spPr>
+      </p:pic>
+      <p:sp>
+        <p:nvSpPr>
+          <p:cNvPr id="3" name="TextBox 2">
+            <a:extLst>
+              <a:ext uri="{FF2B5EF4-FFF2-40B4-BE49-F238E27FC236}">
+                <a16:creationId xmlns:a16="http://schemas.microsoft.com/office/drawing/2014/main" id="{3C1D980F-7C47-C9A3-FBC1-631B20616155}"/>
+              </a:ext>
+            </a:extLst>
+          </p:cNvPr>
+          <p:cNvSpPr txBox="1"/>
+          <p:nvPr/>
+        </p:nvSpPr>
+        <p:spPr>
+          <a:xfrm>
+            <a:off x="352245" y="1656991"/>
+            <a:ext cx="11290847" cy="3139321"/>
+          </a:xfrm>
+          <a:prstGeom prst="rect">
+            <a:avLst/>
+          </a:prstGeom>
+          <a:noFill/>
+        </p:spPr>
+        <p:txBody>
+          <a:bodyPr rot="0" spcFirstLastPara="0" vertOverflow="overflow" horzOverflow="overflow" vert="horz" wrap="square" lIns="91440" tIns="45720" rIns="91440" bIns="45720" numCol="1" spcCol="0" rtlCol="0" fromWordArt="0" anchor="t" anchorCtr="0" forceAA="0" compatLnSpc="1">
+            <a:prstTxWarp prst="textNoShape">
+              <a:avLst/>
+            </a:prstTxWarp>
+            <a:spAutoFit/>
+          </a:bodyPr>
+          <a:lstStyle/>
+          <a:p>
+            <a:pPr marL="285750" indent="-285750">
+              <a:buFont typeface="Arial"/>
+              <a:buChar char="•"/>
+            </a:pPr>
+            <a:r>
+              <a:rPr lang="en-US" dirty="0"/>
+              <a:t>React: Used to build the frontend interface. It allows the application to be organized into reusable components and interactive pages, including class pages, profile pages, resource views, administrative interfaces, and account-related screens.</a:t>
+            </a:r>
+          </a:p>
+          <a:p>
+            <a:pPr marL="285750" indent="-285750">
+              <a:buFont typeface="Arial"/>
+              <a:buChar char="•"/>
+            </a:pPr>
+            <a:endParaRPr lang="en-US" dirty="0"/>
+          </a:p>
+          <a:p>
+            <a:pPr marL="285750" indent="-285750">
+              <a:buFont typeface="Arial"/>
+              <a:buChar char="•"/>
+            </a:pPr>
+            <a:r>
+              <a:rPr lang="en-US" dirty="0"/>
+              <a:t>Firebase: Provides services used to support </a:t>
+            </a:r>
+            <a:r>
+              <a:rPr lang="en-US" dirty="0" err="1"/>
+              <a:t>PitHub's</a:t>
+            </a:r>
+            <a:r>
+              <a:rPr lang="en-US" dirty="0"/>
+              <a:t> data, authentication, and file-management requirements, and file-management requirements. Firebase services help the application manage user information, academic resources , uploaded files, and access permissions. </a:t>
+            </a:r>
+          </a:p>
+          <a:p>
+            <a:pPr marL="285750" indent="-285750">
+              <a:buFont typeface="Arial"/>
+              <a:buChar char="•"/>
+            </a:pPr>
+            <a:endParaRPr lang="en-US" dirty="0"/>
+          </a:p>
+          <a:p>
+            <a:pPr marL="285750" indent="-285750">
+              <a:buFont typeface="Arial"/>
+              <a:buChar char="•"/>
+            </a:pPr>
+            <a:r>
+              <a:rPr lang="en-US" dirty="0"/>
+              <a:t>GitHub: Used for source-code management, issue tracking, documentation, collaboration, and reviewing changes. It allows the development team to coordinate work and maintain a shared record of the project's progress.</a:t>
+            </a:r>
+          </a:p>
+        </p:txBody>
+      </p:sp>
+    </p:spTree>
+    <p:extLst>
+      <p:ext uri="{BB962C8B-B14F-4D97-AF65-F5344CB8AC3E}">
+        <p14:creationId xmlns:p14="http://schemas.microsoft.com/office/powerpoint/2010/main" val="1958082237"/>
+      </p:ext>
+    </p:extLst>
+  </p:cSld>
+  <p:clrMapOvr>
+    <a:masterClrMapping/>
+  </p:clrMapOvr>
+</p:sld>
+</file>
+
+<file path=ppt/slides/slide4.xml><?xml version="1.0" encoding="utf-8"?>
+<p:sld xmlns:a="http://schemas.openxmlformats.org/drawingml/2006/main" xmlns:r="http://schemas.openxmlformats.org/officeDocument/2006/relationships" xmlns:p="http://schemas.openxmlformats.org/presentationml/2006/main">
+  <p:cSld>
+    <p:spTree>
+      <p:nvGrpSpPr>
         <p:cNvPr id="1" name=""/>
         <p:cNvGrpSpPr/>
         <p:nvPr/>
@@ -10257,8 +10620,8 @@
         </p:blipFill>
         <p:spPr>
           <a:xfrm>
-            <a:off x="3050578" y="2940538"/>
-            <a:ext cx="4869689" cy="3468077"/>
+            <a:off x="2679348" y="2667000"/>
+            <a:ext cx="5387457" cy="3839307"/>
           </a:xfrm>
           <a:prstGeom prst="rect">
             <a:avLst/>
@@ -10278,7 +10641,7 @@
 </p:sld>
 </file>
 
-<file path=ppt/slides/slide3.xml><?xml version="1.0" encoding="utf-8"?>
+<file path=ppt/slides/slide5.xml><?xml version="1.0" encoding="utf-8"?>
 <p:sld xmlns:a="http://schemas.openxmlformats.org/drawingml/2006/main" xmlns:r="http://schemas.openxmlformats.org/officeDocument/2006/relationships" xmlns:p="http://schemas.openxmlformats.org/presentationml/2006/main">
   <p:cSld>
     <p:spTree>
@@ -10487,7 +10850,7 @@
 </p:sld>
 </file>
 
-<file path=ppt/slides/slide4.xml><?xml version="1.0" encoding="utf-8"?>
+<file path=ppt/slides/slide6.xml><?xml version="1.0" encoding="utf-8"?>
 <p:sld xmlns:a="http://schemas.openxmlformats.org/drawingml/2006/main" xmlns:r="http://schemas.openxmlformats.org/officeDocument/2006/relationships" xmlns:p="http://schemas.openxmlformats.org/presentationml/2006/main">
   <p:cSld>
     <p:spTree>
@@ -10685,7 +11048,7 @@
 </p:sld>
 </file>
 
-<file path=ppt/slides/slide5.xml><?xml version="1.0" encoding="utf-8"?>
+<file path=ppt/slides/slide7.xml><?xml version="1.0" encoding="utf-8"?>
 <p:sld xmlns:a="http://schemas.openxmlformats.org/drawingml/2006/main" xmlns:r="http://schemas.openxmlformats.org/officeDocument/2006/relationships" xmlns:p="http://schemas.openxmlformats.org/presentationml/2006/main">
   <p:cSld>
     <p:spTree>
@@ -10885,7 +11248,7 @@
 </p:sld>
 </file>
 
-<file path=ppt/slides/slide6.xml><?xml version="1.0" encoding="utf-8"?>
+<file path=ppt/slides/slide8.xml><?xml version="1.0" encoding="utf-8"?>
 <p:sld xmlns:a="http://schemas.openxmlformats.org/drawingml/2006/main" xmlns:r="http://schemas.openxmlformats.org/officeDocument/2006/relationships" xmlns:p="http://schemas.openxmlformats.org/presentationml/2006/main">
   <p:cSld>
     <p:spTree>
